--- a/docs/presentation/prob-period-1.pptx
+++ b/docs/presentation/prob-period-1.pptx
@@ -10003,7 +10003,7 @@
                 </a:solidFill>
                 <a:latin typeface="Segoe UI"/>
               </a:rPr>
-              <a:t>pre-defense-1: </a:t>
+              <a:t>prob-period-1: </a:t>
             </a:r>
             <a:r>
               <a:rPr lang="en-US" sz="1500" b="0" dirty="0">

--- a/docs/presentation/prob-period-1.pptx
+++ b/docs/presentation/prob-period-1.pptx
@@ -2298,23 +2298,51 @@
           </a:bodyPr>
           <a:lstStyle/>
           <a:p>
+            <a:pPr>
+              <a:lnSpc>
+                <a:spcPts val="1680"/>
+              </a:lnSpc>
+            </a:pPr>
+            <a:r>
+              <a:rPr lang="en-US" sz="1200" dirty="0">
+                <a:solidFill>
+                  <a:srgbClr val="5B6470"/>
+                </a:solidFill>
+                <a:latin typeface="Segoe UI" pitchFamily="34" charset="0"/>
+                <a:ea typeface="Segoe UI" pitchFamily="34" charset="-122"/>
+                <a:cs typeface="Segoe UI" pitchFamily="34" charset="-120"/>
+              </a:rPr>
+              <a:t>Multilingual Phishing Detection </a:t>
+            </a:r>
+            <a:r>
+              <a:rPr lang="en-US" sz="1200" dirty="0" smtClean="0">
+                <a:solidFill>
+                  <a:srgbClr val="5B6470"/>
+                </a:solidFill>
+                <a:latin typeface="Segoe UI" pitchFamily="34" charset="0"/>
+                <a:ea typeface="Segoe UI" pitchFamily="34" charset="-122"/>
+                <a:cs typeface="Segoe UI" pitchFamily="34" charset="-120"/>
+              </a:rPr>
+              <a:t>· </a:t>
+            </a:r>
+            <a:r>
+              <a:rPr lang="en-US" sz="1200" dirty="0">
+                <a:solidFill>
+                  <a:schemeClr val="accent6">
+                    <a:lumMod val="75000"/>
+                  </a:schemeClr>
+                </a:solidFill>
+              </a:rPr>
+              <a:t>Prob-period-1</a:t>
+            </a:r>
+          </a:p>
+          <a:p>
             <a:pPr marL="0" indent="0" algn="l">
               <a:lnSpc>
                 <a:spcPts val="1680"/>
               </a:lnSpc>
               <a:buNone/>
             </a:pPr>
-            <a:r>
-              <a:rPr lang="en-US" sz="1200" dirty="0">
-                <a:solidFill>
-                  <a:srgbClr val="5B6470"/>
-                </a:solidFill>
-                <a:latin typeface="Segoe UI" pitchFamily="34" charset="0"/>
-                <a:ea typeface="Segoe UI" pitchFamily="34" charset="-122"/>
-                <a:cs typeface="Segoe UI" pitchFamily="34" charset="-120"/>
-              </a:rPr>
-              <a:t>Multilingual Phishing Detection · Pre-defense</a:t>
-            </a:r>
             <a:endParaRPr lang="en-US" sz="1200" dirty="0"/>
           </a:p>
         </p:txBody>
@@ -3837,23 +3865,40 @@
           </a:bodyPr>
           <a:lstStyle/>
           <a:p>
+            <a:pPr>
+              <a:lnSpc>
+                <a:spcPts val="1680"/>
+              </a:lnSpc>
+            </a:pPr>
+            <a:r>
+              <a:rPr lang="en-US" sz="1200" dirty="0">
+                <a:solidFill>
+                  <a:srgbClr val="5B6470"/>
+                </a:solidFill>
+                <a:latin typeface="Segoe UI" pitchFamily="34" charset="0"/>
+                <a:ea typeface="Segoe UI" pitchFamily="34" charset="-122"/>
+                <a:cs typeface="Segoe UI" pitchFamily="34" charset="-120"/>
+              </a:rPr>
+              <a:t>Multilingual Phishing Detection · </a:t>
+            </a:r>
+            <a:r>
+              <a:rPr lang="en-US" sz="1200" dirty="0">
+                <a:solidFill>
+                  <a:schemeClr val="accent6">
+                    <a:lumMod val="75000"/>
+                  </a:schemeClr>
+                </a:solidFill>
+              </a:rPr>
+              <a:t>Prob-period-1</a:t>
+            </a:r>
+          </a:p>
+          <a:p>
             <a:pPr marL="0" indent="0" algn="l">
               <a:lnSpc>
                 <a:spcPts val="1680"/>
               </a:lnSpc>
               <a:buNone/>
             </a:pPr>
-            <a:r>
-              <a:rPr lang="en-US" sz="1200" dirty="0">
-                <a:solidFill>
-                  <a:srgbClr val="5B6470"/>
-                </a:solidFill>
-                <a:latin typeface="Segoe UI" pitchFamily="34" charset="0"/>
-                <a:ea typeface="Segoe UI" pitchFamily="34" charset="-122"/>
-                <a:cs typeface="Segoe UI" pitchFamily="34" charset="-120"/>
-              </a:rPr>
-              <a:t>Multilingual Phishing Detection · Pre-defense</a:t>
-            </a:r>
             <a:endParaRPr lang="en-US" sz="1200" dirty="0"/>
           </a:p>
         </p:txBody>
@@ -6699,23 +6744,40 @@
           </a:bodyPr>
           <a:lstStyle/>
           <a:p>
+            <a:pPr>
+              <a:lnSpc>
+                <a:spcPts val="1680"/>
+              </a:lnSpc>
+            </a:pPr>
+            <a:r>
+              <a:rPr lang="en-US" sz="1200" dirty="0">
+                <a:solidFill>
+                  <a:srgbClr val="5B6470"/>
+                </a:solidFill>
+                <a:latin typeface="Segoe UI" pitchFamily="34" charset="0"/>
+                <a:ea typeface="Segoe UI" pitchFamily="34" charset="-122"/>
+                <a:cs typeface="Segoe UI" pitchFamily="34" charset="-120"/>
+              </a:rPr>
+              <a:t>Multilingual Phishing Detection · </a:t>
+            </a:r>
+            <a:r>
+              <a:rPr lang="en-US" sz="1200" dirty="0">
+                <a:solidFill>
+                  <a:schemeClr val="accent6">
+                    <a:lumMod val="75000"/>
+                  </a:schemeClr>
+                </a:solidFill>
+              </a:rPr>
+              <a:t>Prob-period-1</a:t>
+            </a:r>
+          </a:p>
+          <a:p>
             <a:pPr marL="0" indent="0" algn="l">
               <a:lnSpc>
                 <a:spcPts val="1680"/>
               </a:lnSpc>
               <a:buNone/>
             </a:pPr>
-            <a:r>
-              <a:rPr lang="en-US" sz="1200" dirty="0">
-                <a:solidFill>
-                  <a:srgbClr val="5B6470"/>
-                </a:solidFill>
-                <a:latin typeface="Segoe UI" pitchFamily="34" charset="0"/>
-                <a:ea typeface="Segoe UI" pitchFamily="34" charset="-122"/>
-                <a:cs typeface="Segoe UI" pitchFamily="34" charset="-120"/>
-              </a:rPr>
-              <a:t>Multilingual Phishing Detection · Pre-defense</a:t>
-            </a:r>
             <a:endParaRPr lang="en-US" sz="1200" dirty="0"/>
           </a:p>
         </p:txBody>
@@ -7192,23 +7254,51 @@
           </a:bodyPr>
           <a:lstStyle/>
           <a:p>
+            <a:pPr>
+              <a:lnSpc>
+                <a:spcPts val="1680"/>
+              </a:lnSpc>
+            </a:pPr>
+            <a:r>
+              <a:rPr lang="en-US" sz="1200" dirty="0">
+                <a:solidFill>
+                  <a:srgbClr val="5B6470"/>
+                </a:solidFill>
+                <a:latin typeface="Segoe UI" pitchFamily="34" charset="0"/>
+                <a:ea typeface="Segoe UI" pitchFamily="34" charset="-122"/>
+                <a:cs typeface="Segoe UI" pitchFamily="34" charset="-120"/>
+              </a:rPr>
+              <a:t>Multilingual Phishing Detection </a:t>
+            </a:r>
+            <a:r>
+              <a:rPr lang="en-US" sz="1200" dirty="0" smtClean="0">
+                <a:solidFill>
+                  <a:srgbClr val="5B6470"/>
+                </a:solidFill>
+                <a:latin typeface="Segoe UI" pitchFamily="34" charset="0"/>
+                <a:ea typeface="Segoe UI" pitchFamily="34" charset="-122"/>
+                <a:cs typeface="Segoe UI" pitchFamily="34" charset="-120"/>
+              </a:rPr>
+              <a:t>· </a:t>
+            </a:r>
+            <a:r>
+              <a:rPr lang="en-US" sz="1200" dirty="0">
+                <a:solidFill>
+                  <a:schemeClr val="accent6">
+                    <a:lumMod val="75000"/>
+                  </a:schemeClr>
+                </a:solidFill>
+              </a:rPr>
+              <a:t>Prob-period-1</a:t>
+            </a:r>
+          </a:p>
+          <a:p>
             <a:pPr marL="0" indent="0" algn="l">
               <a:lnSpc>
                 <a:spcPts val="1680"/>
               </a:lnSpc>
               <a:buNone/>
             </a:pPr>
-            <a:r>
-              <a:rPr lang="en-US" sz="1200" dirty="0">
-                <a:solidFill>
-                  <a:srgbClr val="5B6470"/>
-                </a:solidFill>
-                <a:latin typeface="Segoe UI" pitchFamily="34" charset="0"/>
-                <a:ea typeface="Segoe UI" pitchFamily="34" charset="-122"/>
-                <a:cs typeface="Segoe UI" pitchFamily="34" charset="-120"/>
-              </a:rPr>
-              <a:t>Multilingual Phishing Detection · Pre-defense</a:t>
-            </a:r>
             <a:endParaRPr lang="en-US" sz="1200" dirty="0"/>
           </a:p>
         </p:txBody>
@@ -8123,23 +8213,51 @@
           </a:bodyPr>
           <a:lstStyle/>
           <a:p>
+            <a:pPr>
+              <a:lnSpc>
+                <a:spcPts val="1680"/>
+              </a:lnSpc>
+            </a:pPr>
+            <a:r>
+              <a:rPr lang="en-US" sz="1200" dirty="0">
+                <a:solidFill>
+                  <a:srgbClr val="5B6470"/>
+                </a:solidFill>
+                <a:latin typeface="Segoe UI" pitchFamily="34" charset="0"/>
+                <a:ea typeface="Segoe UI" pitchFamily="34" charset="-122"/>
+                <a:cs typeface="Segoe UI" pitchFamily="34" charset="-120"/>
+              </a:rPr>
+              <a:t>Multilingual Phishing Detection </a:t>
+            </a:r>
+            <a:r>
+              <a:rPr lang="en-US" sz="1200" dirty="0" smtClean="0">
+                <a:solidFill>
+                  <a:srgbClr val="5B6470"/>
+                </a:solidFill>
+                <a:latin typeface="Segoe UI" pitchFamily="34" charset="0"/>
+                <a:ea typeface="Segoe UI" pitchFamily="34" charset="-122"/>
+                <a:cs typeface="Segoe UI" pitchFamily="34" charset="-120"/>
+              </a:rPr>
+              <a:t>· </a:t>
+            </a:r>
+            <a:r>
+              <a:rPr lang="en-US" sz="1200" dirty="0">
+                <a:solidFill>
+                  <a:schemeClr val="accent6">
+                    <a:lumMod val="75000"/>
+                  </a:schemeClr>
+                </a:solidFill>
+              </a:rPr>
+              <a:t>Prob-period-1</a:t>
+            </a:r>
+          </a:p>
+          <a:p>
             <a:pPr marL="0" indent="0" algn="l">
               <a:lnSpc>
                 <a:spcPts val="1680"/>
               </a:lnSpc>
               <a:buNone/>
             </a:pPr>
-            <a:r>
-              <a:rPr lang="en-US" sz="1200" dirty="0">
-                <a:solidFill>
-                  <a:srgbClr val="5B6470"/>
-                </a:solidFill>
-                <a:latin typeface="Segoe UI" pitchFamily="34" charset="0"/>
-                <a:ea typeface="Segoe UI" pitchFamily="34" charset="-122"/>
-                <a:cs typeface="Segoe UI" pitchFamily="34" charset="-120"/>
-              </a:rPr>
-              <a:t>Multilingual Phishing Detection · Pre-defense</a:t>
-            </a:r>
             <a:endParaRPr lang="en-US" sz="1200" dirty="0"/>
           </a:p>
         </p:txBody>
@@ -8803,23 +8921,40 @@
           </a:bodyPr>
           <a:lstStyle/>
           <a:p>
+            <a:pPr>
+              <a:lnSpc>
+                <a:spcPts val="1680"/>
+              </a:lnSpc>
+            </a:pPr>
+            <a:r>
+              <a:rPr lang="en-US" sz="1200" dirty="0">
+                <a:solidFill>
+                  <a:srgbClr val="5B6470"/>
+                </a:solidFill>
+                <a:latin typeface="Segoe UI" pitchFamily="34" charset="0"/>
+                <a:ea typeface="Segoe UI" pitchFamily="34" charset="-122"/>
+                <a:cs typeface="Segoe UI" pitchFamily="34" charset="-120"/>
+              </a:rPr>
+              <a:t>Multilingual Phishing Detection · </a:t>
+            </a:r>
+            <a:r>
+              <a:rPr lang="en-US" sz="1200" dirty="0">
+                <a:solidFill>
+                  <a:schemeClr val="accent6">
+                    <a:lumMod val="75000"/>
+                  </a:schemeClr>
+                </a:solidFill>
+              </a:rPr>
+              <a:t>Prob-period-1</a:t>
+            </a:r>
+          </a:p>
+          <a:p>
             <a:pPr marL="0" indent="0" algn="l">
               <a:lnSpc>
                 <a:spcPts val="1680"/>
               </a:lnSpc>
               <a:buNone/>
             </a:pPr>
-            <a:r>
-              <a:rPr lang="en-US" sz="1200" dirty="0">
-                <a:solidFill>
-                  <a:srgbClr val="5B6470"/>
-                </a:solidFill>
-                <a:latin typeface="Segoe UI" pitchFamily="34" charset="0"/>
-                <a:ea typeface="Segoe UI" pitchFamily="34" charset="-122"/>
-                <a:cs typeface="Segoe UI" pitchFamily="34" charset="-120"/>
-              </a:rPr>
-              <a:t>Multilingual Phishing Detection · Pre-defense</a:t>
-            </a:r>
             <a:endParaRPr lang="en-US" sz="1200" dirty="0"/>
           </a:p>
         </p:txBody>
@@ -9617,23 +9752,51 @@
           </a:bodyPr>
           <a:lstStyle/>
           <a:p>
+            <a:pPr>
+              <a:lnSpc>
+                <a:spcPts val="1680"/>
+              </a:lnSpc>
+            </a:pPr>
+            <a:r>
+              <a:rPr lang="en-US" sz="1200" dirty="0">
+                <a:solidFill>
+                  <a:srgbClr val="5B6470"/>
+                </a:solidFill>
+                <a:latin typeface="Segoe UI" pitchFamily="34" charset="0"/>
+                <a:ea typeface="Segoe UI" pitchFamily="34" charset="-122"/>
+                <a:cs typeface="Segoe UI" pitchFamily="34" charset="-120"/>
+              </a:rPr>
+              <a:t>Multilingual Phishing Detection </a:t>
+            </a:r>
+            <a:r>
+              <a:rPr lang="en-US" sz="1200" dirty="0" smtClean="0">
+                <a:solidFill>
+                  <a:srgbClr val="5B6470"/>
+                </a:solidFill>
+                <a:latin typeface="Segoe UI" pitchFamily="34" charset="0"/>
+                <a:ea typeface="Segoe UI" pitchFamily="34" charset="-122"/>
+                <a:cs typeface="Segoe UI" pitchFamily="34" charset="-120"/>
+              </a:rPr>
+              <a:t>· </a:t>
+            </a:r>
+            <a:r>
+              <a:rPr lang="en-US" sz="1200" dirty="0">
+                <a:solidFill>
+                  <a:schemeClr val="accent6">
+                    <a:lumMod val="75000"/>
+                  </a:schemeClr>
+                </a:solidFill>
+              </a:rPr>
+              <a:t>Prob-period-1</a:t>
+            </a:r>
+          </a:p>
+          <a:p>
             <a:pPr marL="0" indent="0" algn="l">
               <a:lnSpc>
                 <a:spcPts val="1680"/>
               </a:lnSpc>
               <a:buNone/>
             </a:pPr>
-            <a:r>
-              <a:rPr lang="en-US" sz="1200" dirty="0">
-                <a:solidFill>
-                  <a:srgbClr val="5B6470"/>
-                </a:solidFill>
-                <a:latin typeface="Segoe UI" pitchFamily="34" charset="0"/>
-                <a:ea typeface="Segoe UI" pitchFamily="34" charset="-122"/>
-                <a:cs typeface="Segoe UI" pitchFamily="34" charset="-120"/>
-              </a:rPr>
-              <a:t>Multilingual Phishing Detection · Pre-defense</a:t>
-            </a:r>
             <a:endParaRPr lang="en-US" sz="1200" dirty="0"/>
           </a:p>
         </p:txBody>
@@ -9816,23 +9979,40 @@
           </a:bodyPr>
           <a:lstStyle/>
           <a:p>
+            <a:pPr>
+              <a:lnSpc>
+                <a:spcPts val="1680"/>
+              </a:lnSpc>
+            </a:pPr>
+            <a:r>
+              <a:rPr lang="en-US" sz="1200" dirty="0">
+                <a:solidFill>
+                  <a:srgbClr val="5B6470"/>
+                </a:solidFill>
+                <a:latin typeface="Segoe UI" pitchFamily="34" charset="0"/>
+                <a:ea typeface="Segoe UI" pitchFamily="34" charset="-122"/>
+                <a:cs typeface="Segoe UI" pitchFamily="34" charset="-120"/>
+              </a:rPr>
+              <a:t>Multilingual Phishing Detection · </a:t>
+            </a:r>
+            <a:r>
+              <a:rPr lang="en-US" sz="1200" dirty="0">
+                <a:solidFill>
+                  <a:schemeClr val="accent6">
+                    <a:lumMod val="75000"/>
+                  </a:schemeClr>
+                </a:solidFill>
+              </a:rPr>
+              <a:t>Prob-period-1</a:t>
+            </a:r>
+          </a:p>
+          <a:p>
             <a:pPr marL="0" indent="0" algn="l">
               <a:lnSpc>
                 <a:spcPts val="1680"/>
               </a:lnSpc>
               <a:buNone/>
             </a:pPr>
-            <a:r>
-              <a:rPr lang="en-US" sz="1200" dirty="0">
-                <a:solidFill>
-                  <a:srgbClr val="5B6470"/>
-                </a:solidFill>
-                <a:latin typeface="Segoe UI" pitchFamily="34" charset="0"/>
-                <a:ea typeface="Segoe UI" pitchFamily="34" charset="-122"/>
-                <a:cs typeface="Segoe UI" pitchFamily="34" charset="-120"/>
-              </a:rPr>
-              <a:t>Multilingual Phishing Detection · Pre-defense</a:t>
-            </a:r>
             <a:endParaRPr lang="en-US" sz="1200" dirty="0"/>
           </a:p>
         </p:txBody>
@@ -10563,23 +10743,51 @@
           </a:bodyPr>
           <a:lstStyle/>
           <a:p>
+            <a:pPr>
+              <a:lnSpc>
+                <a:spcPts val="1680"/>
+              </a:lnSpc>
+            </a:pPr>
+            <a:r>
+              <a:rPr lang="en-US" sz="1200" dirty="0">
+                <a:solidFill>
+                  <a:srgbClr val="5B6470"/>
+                </a:solidFill>
+                <a:latin typeface="Segoe UI" pitchFamily="34" charset="0"/>
+                <a:ea typeface="Segoe UI" pitchFamily="34" charset="-122"/>
+                <a:cs typeface="Segoe UI" pitchFamily="34" charset="-120"/>
+              </a:rPr>
+              <a:t>Multilingual Phishing Detection </a:t>
+            </a:r>
+            <a:r>
+              <a:rPr lang="en-US" sz="1200" dirty="0" smtClean="0">
+                <a:solidFill>
+                  <a:srgbClr val="5B6470"/>
+                </a:solidFill>
+                <a:latin typeface="Segoe UI" pitchFamily="34" charset="0"/>
+                <a:ea typeface="Segoe UI" pitchFamily="34" charset="-122"/>
+                <a:cs typeface="Segoe UI" pitchFamily="34" charset="-120"/>
+              </a:rPr>
+              <a:t>· </a:t>
+            </a:r>
+            <a:r>
+              <a:rPr lang="en-US" sz="1200" dirty="0">
+                <a:solidFill>
+                  <a:schemeClr val="accent6">
+                    <a:lumMod val="75000"/>
+                  </a:schemeClr>
+                </a:solidFill>
+              </a:rPr>
+              <a:t>Prob-period-1</a:t>
+            </a:r>
+          </a:p>
+          <a:p>
             <a:pPr marL="0" indent="0" algn="l">
               <a:lnSpc>
                 <a:spcPts val="1680"/>
               </a:lnSpc>
               <a:buNone/>
             </a:pPr>
-            <a:r>
-              <a:rPr lang="en-US" sz="1200" dirty="0">
-                <a:solidFill>
-                  <a:srgbClr val="5B6470"/>
-                </a:solidFill>
-                <a:latin typeface="Segoe UI" pitchFamily="34" charset="0"/>
-                <a:ea typeface="Segoe UI" pitchFamily="34" charset="-122"/>
-                <a:cs typeface="Segoe UI" pitchFamily="34" charset="-120"/>
-              </a:rPr>
-              <a:t>Multilingual Phishing Detection · Pre-defense</a:t>
-            </a:r>
             <a:endParaRPr lang="en-US" sz="1200" dirty="0"/>
           </a:p>
         </p:txBody>
@@ -10636,7 +10844,7 @@
         </p:nvSpPr>
         <p:spPr>
           <a:xfrm>
-            <a:off x="812800" y="2177000"/>
+            <a:off x="812800" y="2057629"/>
             <a:ext cx="10566400" cy="4300000"/>
           </a:xfrm>
           <a:prstGeom prst="rect">
@@ -10846,7 +11054,7 @@
         </p:nvSpPr>
         <p:spPr>
           <a:xfrm>
-            <a:off x="812800" y="6238258"/>
+            <a:off x="812800" y="6233833"/>
             <a:ext cx="6540500" cy="238742"/>
           </a:xfrm>
           <a:prstGeom prst="rect">
@@ -10861,23 +11069,58 @@
           </a:bodyPr>
           <a:lstStyle/>
           <a:p>
+            <a:pPr>
+              <a:lnSpc>
+                <a:spcPts val="1680"/>
+              </a:lnSpc>
+            </a:pPr>
+            <a:r>
+              <a:rPr lang="en-US" sz="1200" dirty="0">
+                <a:solidFill>
+                  <a:srgbClr val="5B6470"/>
+                </a:solidFill>
+                <a:latin typeface="Segoe UI" pitchFamily="34" charset="0"/>
+                <a:ea typeface="Segoe UI" pitchFamily="34" charset="-122"/>
+                <a:cs typeface="Segoe UI" pitchFamily="34" charset="-120"/>
+              </a:rPr>
+              <a:t>Multilingual Phishing Detection </a:t>
+            </a:r>
+            <a:r>
+              <a:rPr lang="en-US" sz="1200" dirty="0" smtClean="0">
+                <a:solidFill>
+                  <a:srgbClr val="5B6470"/>
+                </a:solidFill>
+                <a:latin typeface="Segoe UI" pitchFamily="34" charset="0"/>
+                <a:ea typeface="Segoe UI" pitchFamily="34" charset="-122"/>
+                <a:cs typeface="Segoe UI" pitchFamily="34" charset="-120"/>
+              </a:rPr>
+              <a:t>· </a:t>
+            </a:r>
+            <a:r>
+              <a:rPr lang="en-US" sz="1200" dirty="0" smtClean="0">
+                <a:solidFill>
+                  <a:schemeClr val="accent6">
+                    <a:lumMod val="75000"/>
+                  </a:schemeClr>
+                </a:solidFill>
+              </a:rPr>
+              <a:t>Prob-period-1</a:t>
+            </a:r>
+            <a:endParaRPr lang="en-US" sz="1200" dirty="0">
+              <a:solidFill>
+                <a:schemeClr val="accent6">
+                  <a:lumMod val="75000"/>
+                </a:schemeClr>
+              </a:solidFill>
+            </a:endParaRPr>
+          </a:p>
+          <a:p>
             <a:pPr marL="0" indent="0" algn="l">
               <a:lnSpc>
                 <a:spcPts val="1680"/>
               </a:lnSpc>
               <a:buNone/>
             </a:pPr>
-            <a:r>
-              <a:rPr lang="en-US" sz="1200" dirty="0">
-                <a:solidFill>
-                  <a:srgbClr val="5B6470"/>
-                </a:solidFill>
-                <a:latin typeface="Segoe UI" pitchFamily="34" charset="0"/>
-                <a:ea typeface="Segoe UI" pitchFamily="34" charset="-122"/>
-                <a:cs typeface="Segoe UI" pitchFamily="34" charset="-120"/>
-              </a:rPr>
-              <a:t>Multilingual Phishing Detection · Pre-defense</a:t>
-            </a:r>
             <a:endParaRPr lang="en-US" sz="1200" dirty="0"/>
           </a:p>
         </p:txBody>
@@ -11275,23 +11518,58 @@
           </a:bodyPr>
           <a:lstStyle/>
           <a:p>
+            <a:pPr>
+              <a:lnSpc>
+                <a:spcPts val="1680"/>
+              </a:lnSpc>
+            </a:pPr>
+            <a:r>
+              <a:rPr lang="en-US" sz="1200" dirty="0">
+                <a:solidFill>
+                  <a:srgbClr val="5B6470"/>
+                </a:solidFill>
+                <a:latin typeface="Segoe UI" pitchFamily="34" charset="0"/>
+                <a:ea typeface="Segoe UI" pitchFamily="34" charset="-122"/>
+                <a:cs typeface="Segoe UI" pitchFamily="34" charset="-120"/>
+              </a:rPr>
+              <a:t>Multilingual Phishing Detection </a:t>
+            </a:r>
+            <a:r>
+              <a:rPr lang="en-US" sz="1200" dirty="0" smtClean="0">
+                <a:solidFill>
+                  <a:srgbClr val="5B6470"/>
+                </a:solidFill>
+                <a:latin typeface="Segoe UI" pitchFamily="34" charset="0"/>
+                <a:ea typeface="Segoe UI" pitchFamily="34" charset="-122"/>
+                <a:cs typeface="Segoe UI" pitchFamily="34" charset="-120"/>
+              </a:rPr>
+              <a:t>· </a:t>
+            </a:r>
+            <a:r>
+              <a:rPr lang="en-US" sz="1200" dirty="0" smtClean="0">
+                <a:solidFill>
+                  <a:schemeClr val="accent6">
+                    <a:lumMod val="75000"/>
+                  </a:schemeClr>
+                </a:solidFill>
+              </a:rPr>
+              <a:t>Prob-period-1</a:t>
+            </a:r>
+            <a:endParaRPr lang="en-US" sz="1200" dirty="0">
+              <a:solidFill>
+                <a:schemeClr val="accent6">
+                  <a:lumMod val="75000"/>
+                </a:schemeClr>
+              </a:solidFill>
+            </a:endParaRPr>
+          </a:p>
+          <a:p>
             <a:pPr marL="0" indent="0" algn="l">
               <a:lnSpc>
                 <a:spcPts val="1680"/>
               </a:lnSpc>
               <a:buNone/>
             </a:pPr>
-            <a:r>
-              <a:rPr lang="en-US" sz="1200" dirty="0">
-                <a:solidFill>
-                  <a:srgbClr val="5B6470"/>
-                </a:solidFill>
-                <a:latin typeface="Segoe UI" pitchFamily="34" charset="0"/>
-                <a:ea typeface="Segoe UI" pitchFamily="34" charset="-122"/>
-                <a:cs typeface="Segoe UI" pitchFamily="34" charset="-120"/>
-              </a:rPr>
-              <a:t>Multilingual Phishing Detection · Pre-defense</a:t>
-            </a:r>
             <a:endParaRPr lang="en-US" sz="1200" dirty="0"/>
           </a:p>
         </p:txBody>
@@ -11577,11 +11855,10 @@
           </a:bodyPr>
           <a:lstStyle/>
           <a:p>
-            <a:pPr marL="0" indent="0" algn="l">
+            <a:pPr>
               <a:lnSpc>
                 <a:spcPts val="1680"/>
               </a:lnSpc>
-              <a:buNone/>
             </a:pPr>
             <a:r>
               <a:rPr lang="en-US" sz="1200" dirty="0">
@@ -11592,9 +11869,35 @@
                 <a:ea typeface="Segoe UI" pitchFamily="34" charset="-122"/>
                 <a:cs typeface="Segoe UI" pitchFamily="34" charset="-120"/>
               </a:rPr>
-              <a:t>Multilingual Phishing Detection · Pre-defense</a:t>
-            </a:r>
-            <a:endParaRPr lang="en-US" sz="1200" dirty="0"/>
+              <a:t>Multilingual Phishing Detection · </a:t>
+            </a:r>
+            <a:r>
+              <a:rPr lang="en-US" sz="1200" dirty="0" smtClean="0">
+                <a:solidFill>
+                  <a:schemeClr val="accent6">
+                    <a:lumMod val="75000"/>
+                  </a:schemeClr>
+                </a:solidFill>
+              </a:rPr>
+              <a:t>P</a:t>
+            </a:r>
+            <a:r>
+              <a:rPr lang="en-US" sz="1200" dirty="0" smtClean="0">
+                <a:solidFill>
+                  <a:schemeClr val="accent6">
+                    <a:lumMod val="75000"/>
+                  </a:schemeClr>
+                </a:solidFill>
+              </a:rPr>
+              <a:t>rob-period-1</a:t>
+            </a:r>
+            <a:endParaRPr lang="en-US" sz="1200" dirty="0">
+              <a:solidFill>
+                <a:schemeClr val="accent6">
+                  <a:lumMod val="75000"/>
+                </a:schemeClr>
+              </a:solidFill>
+            </a:endParaRPr>
           </a:p>
         </p:txBody>
       </p:sp>
@@ -11966,23 +12269,51 @@
           </a:bodyPr>
           <a:lstStyle/>
           <a:p>
+            <a:pPr>
+              <a:lnSpc>
+                <a:spcPts val="1680"/>
+              </a:lnSpc>
+            </a:pPr>
+            <a:r>
+              <a:rPr lang="en-US" sz="1200" dirty="0">
+                <a:solidFill>
+                  <a:srgbClr val="5B6470"/>
+                </a:solidFill>
+                <a:latin typeface="Segoe UI" pitchFamily="34" charset="0"/>
+                <a:ea typeface="Segoe UI" pitchFamily="34" charset="-122"/>
+                <a:cs typeface="Segoe UI" pitchFamily="34" charset="-120"/>
+              </a:rPr>
+              <a:t>Multilingual Phishing Detection </a:t>
+            </a:r>
+            <a:r>
+              <a:rPr lang="en-US" sz="1200" dirty="0" smtClean="0">
+                <a:solidFill>
+                  <a:srgbClr val="5B6470"/>
+                </a:solidFill>
+                <a:latin typeface="Segoe UI" pitchFamily="34" charset="0"/>
+                <a:ea typeface="Segoe UI" pitchFamily="34" charset="-122"/>
+                <a:cs typeface="Segoe UI" pitchFamily="34" charset="-120"/>
+              </a:rPr>
+              <a:t>· </a:t>
+            </a:r>
+            <a:r>
+              <a:rPr lang="en-US" sz="1200" dirty="0">
+                <a:solidFill>
+                  <a:schemeClr val="accent6">
+                    <a:lumMod val="75000"/>
+                  </a:schemeClr>
+                </a:solidFill>
+              </a:rPr>
+              <a:t>Prob-period-1</a:t>
+            </a:r>
+          </a:p>
+          <a:p>
             <a:pPr marL="0" indent="0" algn="l">
               <a:lnSpc>
                 <a:spcPts val="1680"/>
               </a:lnSpc>
               <a:buNone/>
             </a:pPr>
-            <a:r>
-              <a:rPr lang="en-US" sz="1200" dirty="0">
-                <a:solidFill>
-                  <a:srgbClr val="5B6470"/>
-                </a:solidFill>
-                <a:latin typeface="Segoe UI" pitchFamily="34" charset="0"/>
-                <a:ea typeface="Segoe UI" pitchFamily="34" charset="-122"/>
-                <a:cs typeface="Segoe UI" pitchFamily="34" charset="-120"/>
-              </a:rPr>
-              <a:t>Multilingual Phishing Detection · Pre-defense</a:t>
-            </a:r>
             <a:endParaRPr lang="en-US" sz="1200" dirty="0"/>
           </a:p>
         </p:txBody>
@@ -12528,23 +12859,51 @@
           </a:bodyPr>
           <a:lstStyle/>
           <a:p>
+            <a:pPr>
+              <a:lnSpc>
+                <a:spcPts val="1680"/>
+              </a:lnSpc>
+            </a:pPr>
+            <a:r>
+              <a:rPr lang="en-US" sz="1200" dirty="0">
+                <a:solidFill>
+                  <a:srgbClr val="5B6470"/>
+                </a:solidFill>
+                <a:latin typeface="Segoe UI" pitchFamily="34" charset="0"/>
+                <a:ea typeface="Segoe UI" pitchFamily="34" charset="-122"/>
+                <a:cs typeface="Segoe UI" pitchFamily="34" charset="-120"/>
+              </a:rPr>
+              <a:t>Multilingual Phishing Detection </a:t>
+            </a:r>
+            <a:r>
+              <a:rPr lang="en-US" sz="1200" dirty="0" smtClean="0">
+                <a:solidFill>
+                  <a:srgbClr val="5B6470"/>
+                </a:solidFill>
+                <a:latin typeface="Segoe UI" pitchFamily="34" charset="0"/>
+                <a:ea typeface="Segoe UI" pitchFamily="34" charset="-122"/>
+                <a:cs typeface="Segoe UI" pitchFamily="34" charset="-120"/>
+              </a:rPr>
+              <a:t>· </a:t>
+            </a:r>
+            <a:r>
+              <a:rPr lang="en-US" sz="1200" dirty="0">
+                <a:solidFill>
+                  <a:schemeClr val="accent6">
+                    <a:lumMod val="75000"/>
+                  </a:schemeClr>
+                </a:solidFill>
+              </a:rPr>
+              <a:t>Prob-period-1</a:t>
+            </a:r>
+          </a:p>
+          <a:p>
             <a:pPr marL="0" indent="0" algn="l">
               <a:lnSpc>
                 <a:spcPts val="1680"/>
               </a:lnSpc>
               <a:buNone/>
             </a:pPr>
-            <a:r>
-              <a:rPr lang="en-US" sz="1200" dirty="0">
-                <a:solidFill>
-                  <a:srgbClr val="5B6470"/>
-                </a:solidFill>
-                <a:latin typeface="Segoe UI" pitchFamily="34" charset="0"/>
-                <a:ea typeface="Segoe UI" pitchFamily="34" charset="-122"/>
-                <a:cs typeface="Segoe UI" pitchFamily="34" charset="-120"/>
-              </a:rPr>
-              <a:t>Multilingual Phishing Detection · Pre-defense</a:t>
-            </a:r>
             <a:endParaRPr lang="en-US" sz="1200" dirty="0"/>
           </a:p>
         </p:txBody>
@@ -13398,23 +13757,40 @@
           </a:bodyPr>
           <a:lstStyle/>
           <a:p>
+            <a:pPr>
+              <a:lnSpc>
+                <a:spcPts val="1680"/>
+              </a:lnSpc>
+            </a:pPr>
+            <a:r>
+              <a:rPr lang="en-US" sz="1200" dirty="0">
+                <a:solidFill>
+                  <a:srgbClr val="5B6470"/>
+                </a:solidFill>
+                <a:latin typeface="Segoe UI" pitchFamily="34" charset="0"/>
+                <a:ea typeface="Segoe UI" pitchFamily="34" charset="-122"/>
+                <a:cs typeface="Segoe UI" pitchFamily="34" charset="-120"/>
+              </a:rPr>
+              <a:t>Multilingual Phishing Detection · </a:t>
+            </a:r>
+            <a:r>
+              <a:rPr lang="en-US" sz="1200" dirty="0">
+                <a:solidFill>
+                  <a:schemeClr val="accent6">
+                    <a:lumMod val="75000"/>
+                  </a:schemeClr>
+                </a:solidFill>
+              </a:rPr>
+              <a:t>Prob-period-1</a:t>
+            </a:r>
+          </a:p>
+          <a:p>
             <a:pPr marL="0" indent="0" algn="l">
               <a:lnSpc>
                 <a:spcPts val="1680"/>
               </a:lnSpc>
               <a:buNone/>
             </a:pPr>
-            <a:r>
-              <a:rPr lang="en-US" sz="1200" dirty="0">
-                <a:solidFill>
-                  <a:srgbClr val="5B6470"/>
-                </a:solidFill>
-                <a:latin typeface="Segoe UI" pitchFamily="34" charset="0"/>
-                <a:ea typeface="Segoe UI" pitchFamily="34" charset="-122"/>
-                <a:cs typeface="Segoe UI" pitchFamily="34" charset="-120"/>
-              </a:rPr>
-              <a:t>Multilingual Phishing Detection · Pre-defense</a:t>
-            </a:r>
             <a:endParaRPr lang="en-US" sz="1200" dirty="0"/>
           </a:p>
         </p:txBody>
@@ -14227,23 +14603,51 @@
           </a:bodyPr>
           <a:lstStyle/>
           <a:p>
+            <a:pPr>
+              <a:lnSpc>
+                <a:spcPts val="1680"/>
+              </a:lnSpc>
+            </a:pPr>
+            <a:r>
+              <a:rPr lang="en-US" sz="1200" dirty="0">
+                <a:solidFill>
+                  <a:srgbClr val="5B6470"/>
+                </a:solidFill>
+                <a:latin typeface="Segoe UI" pitchFamily="34" charset="0"/>
+                <a:ea typeface="Segoe UI" pitchFamily="34" charset="-122"/>
+                <a:cs typeface="Segoe UI" pitchFamily="34" charset="-120"/>
+              </a:rPr>
+              <a:t>Multilingual Phishing Detection </a:t>
+            </a:r>
+            <a:r>
+              <a:rPr lang="en-US" sz="1200" dirty="0" smtClean="0">
+                <a:solidFill>
+                  <a:srgbClr val="5B6470"/>
+                </a:solidFill>
+                <a:latin typeface="Segoe UI" pitchFamily="34" charset="0"/>
+                <a:ea typeface="Segoe UI" pitchFamily="34" charset="-122"/>
+                <a:cs typeface="Segoe UI" pitchFamily="34" charset="-120"/>
+              </a:rPr>
+              <a:t>· </a:t>
+            </a:r>
+            <a:r>
+              <a:rPr lang="en-US" sz="1200" dirty="0">
+                <a:solidFill>
+                  <a:schemeClr val="accent6">
+                    <a:lumMod val="75000"/>
+                  </a:schemeClr>
+                </a:solidFill>
+              </a:rPr>
+              <a:t>Prob-period-1</a:t>
+            </a:r>
+          </a:p>
+          <a:p>
             <a:pPr marL="0" indent="0" algn="l">
               <a:lnSpc>
                 <a:spcPts val="1680"/>
               </a:lnSpc>
               <a:buNone/>
             </a:pPr>
-            <a:r>
-              <a:rPr lang="en-US" sz="1200" dirty="0">
-                <a:solidFill>
-                  <a:srgbClr val="5B6470"/>
-                </a:solidFill>
-                <a:latin typeface="Segoe UI" pitchFamily="34" charset="0"/>
-                <a:ea typeface="Segoe UI" pitchFamily="34" charset="-122"/>
-                <a:cs typeface="Segoe UI" pitchFamily="34" charset="-120"/>
-              </a:rPr>
-              <a:t>Multilingual Phishing Detection · Pre-defense</a:t>
-            </a:r>
             <a:endParaRPr lang="en-US" sz="1200" dirty="0"/>
           </a:p>
         </p:txBody>
@@ -14814,23 +15218,51 @@
           </a:bodyPr>
           <a:lstStyle/>
           <a:p>
+            <a:pPr>
+              <a:lnSpc>
+                <a:spcPts val="1680"/>
+              </a:lnSpc>
+            </a:pPr>
+            <a:r>
+              <a:rPr lang="en-US" sz="1200" dirty="0">
+                <a:solidFill>
+                  <a:srgbClr val="5B6470"/>
+                </a:solidFill>
+                <a:latin typeface="Segoe UI" pitchFamily="34" charset="0"/>
+                <a:ea typeface="Segoe UI" pitchFamily="34" charset="-122"/>
+                <a:cs typeface="Segoe UI" pitchFamily="34" charset="-120"/>
+              </a:rPr>
+              <a:t>Multilingual Phishing Detection </a:t>
+            </a:r>
+            <a:r>
+              <a:rPr lang="en-US" sz="1200" dirty="0" smtClean="0">
+                <a:solidFill>
+                  <a:srgbClr val="5B6470"/>
+                </a:solidFill>
+                <a:latin typeface="Segoe UI" pitchFamily="34" charset="0"/>
+                <a:ea typeface="Segoe UI" pitchFamily="34" charset="-122"/>
+                <a:cs typeface="Segoe UI" pitchFamily="34" charset="-120"/>
+              </a:rPr>
+              <a:t>· </a:t>
+            </a:r>
+            <a:r>
+              <a:rPr lang="en-US" sz="1200" dirty="0">
+                <a:solidFill>
+                  <a:schemeClr val="accent6">
+                    <a:lumMod val="75000"/>
+                  </a:schemeClr>
+                </a:solidFill>
+              </a:rPr>
+              <a:t>Prob-period-1</a:t>
+            </a:r>
+          </a:p>
+          <a:p>
             <a:pPr marL="0" indent="0" algn="l">
               <a:lnSpc>
                 <a:spcPts val="1680"/>
               </a:lnSpc>
               <a:buNone/>
             </a:pPr>
-            <a:r>
-              <a:rPr lang="en-US" sz="1200" dirty="0">
-                <a:solidFill>
-                  <a:srgbClr val="5B6470"/>
-                </a:solidFill>
-                <a:latin typeface="Segoe UI" pitchFamily="34" charset="0"/>
-                <a:ea typeface="Segoe UI" pitchFamily="34" charset="-122"/>
-                <a:cs typeface="Segoe UI" pitchFamily="34" charset="-120"/>
-              </a:rPr>
-              <a:t>Multilingual Phishing Detection · Pre-defense</a:t>
-            </a:r>
             <a:endParaRPr lang="en-US" sz="1200" dirty="0"/>
           </a:p>
         </p:txBody>
@@ -16538,23 +16970,51 @@
           </a:bodyPr>
           <a:lstStyle/>
           <a:p>
+            <a:pPr>
+              <a:lnSpc>
+                <a:spcPts val="1680"/>
+              </a:lnSpc>
+            </a:pPr>
+            <a:r>
+              <a:rPr lang="en-US" sz="1200" dirty="0">
+                <a:solidFill>
+                  <a:srgbClr val="5B6470"/>
+                </a:solidFill>
+                <a:latin typeface="Segoe UI" pitchFamily="34" charset="0"/>
+                <a:ea typeface="Segoe UI" pitchFamily="34" charset="-122"/>
+                <a:cs typeface="Segoe UI" pitchFamily="34" charset="-120"/>
+              </a:rPr>
+              <a:t>Multilingual Phishing Detection </a:t>
+            </a:r>
+            <a:r>
+              <a:rPr lang="en-US" sz="1200" dirty="0" smtClean="0">
+                <a:solidFill>
+                  <a:srgbClr val="5B6470"/>
+                </a:solidFill>
+                <a:latin typeface="Segoe UI" pitchFamily="34" charset="0"/>
+                <a:ea typeface="Segoe UI" pitchFamily="34" charset="-122"/>
+                <a:cs typeface="Segoe UI" pitchFamily="34" charset="-120"/>
+              </a:rPr>
+              <a:t>· </a:t>
+            </a:r>
+            <a:r>
+              <a:rPr lang="en-US" sz="1200" dirty="0">
+                <a:solidFill>
+                  <a:schemeClr val="accent6">
+                    <a:lumMod val="75000"/>
+                  </a:schemeClr>
+                </a:solidFill>
+              </a:rPr>
+              <a:t>Prob-period-1</a:t>
+            </a:r>
+          </a:p>
+          <a:p>
             <a:pPr marL="0" indent="0" algn="l">
               <a:lnSpc>
                 <a:spcPts val="1680"/>
               </a:lnSpc>
               <a:buNone/>
             </a:pPr>
-            <a:r>
-              <a:rPr lang="en-US" sz="1200" dirty="0">
-                <a:solidFill>
-                  <a:srgbClr val="5B6470"/>
-                </a:solidFill>
-                <a:latin typeface="Segoe UI" pitchFamily="34" charset="0"/>
-                <a:ea typeface="Segoe UI" pitchFamily="34" charset="-122"/>
-                <a:cs typeface="Segoe UI" pitchFamily="34" charset="-120"/>
-              </a:rPr>
-              <a:t>Multilingual Phishing Detection · Pre-defense</a:t>
-            </a:r>
             <a:endParaRPr lang="en-US" sz="1200" dirty="0"/>
           </a:p>
         </p:txBody>
@@ -21530,23 +21990,51 @@
           </a:bodyPr>
           <a:lstStyle/>
           <a:p>
+            <a:pPr>
+              <a:lnSpc>
+                <a:spcPts val="1680"/>
+              </a:lnSpc>
+            </a:pPr>
+            <a:r>
+              <a:rPr lang="en-US" sz="1200" dirty="0">
+                <a:solidFill>
+                  <a:srgbClr val="5B6470"/>
+                </a:solidFill>
+                <a:latin typeface="Segoe UI" pitchFamily="34" charset="0"/>
+                <a:ea typeface="Segoe UI" pitchFamily="34" charset="-122"/>
+                <a:cs typeface="Segoe UI" pitchFamily="34" charset="-120"/>
+              </a:rPr>
+              <a:t>Multilingual Phishing Detection </a:t>
+            </a:r>
+            <a:r>
+              <a:rPr lang="en-US" sz="1200" dirty="0" smtClean="0">
+                <a:solidFill>
+                  <a:srgbClr val="5B6470"/>
+                </a:solidFill>
+                <a:latin typeface="Segoe UI" pitchFamily="34" charset="0"/>
+                <a:ea typeface="Segoe UI" pitchFamily="34" charset="-122"/>
+                <a:cs typeface="Segoe UI" pitchFamily="34" charset="-120"/>
+              </a:rPr>
+              <a:t>· </a:t>
+            </a:r>
+            <a:r>
+              <a:rPr lang="en-US" sz="1200" dirty="0">
+                <a:solidFill>
+                  <a:schemeClr val="accent6">
+                    <a:lumMod val="75000"/>
+                  </a:schemeClr>
+                </a:solidFill>
+              </a:rPr>
+              <a:t>Prob-period-1</a:t>
+            </a:r>
+          </a:p>
+          <a:p>
             <a:pPr marL="0" indent="0" algn="l">
               <a:lnSpc>
                 <a:spcPts val="1680"/>
               </a:lnSpc>
               <a:buNone/>
             </a:pPr>
-            <a:r>
-              <a:rPr lang="en-US" sz="1200" dirty="0">
-                <a:solidFill>
-                  <a:srgbClr val="5B6470"/>
-                </a:solidFill>
-                <a:latin typeface="Segoe UI" pitchFamily="34" charset="0"/>
-                <a:ea typeface="Segoe UI" pitchFamily="34" charset="-122"/>
-                <a:cs typeface="Segoe UI" pitchFamily="34" charset="-120"/>
-              </a:rPr>
-              <a:t>Multilingual Phishing Detection · Pre-defense</a:t>
-            </a:r>
             <a:endParaRPr lang="en-US" sz="1200" dirty="0"/>
           </a:p>
         </p:txBody>
